--- a/relay 3.pptx
+++ b/relay 3.pptx
@@ -5,11 +5,12 @@
     <p:sldMasterId id="2147483648" r:id="rId1"/>
   </p:sldMasterIdLst>
   <p:notesMasterIdLst>
-    <p:notesMasterId r:id="rId4"/>
+    <p:notesMasterId r:id="rId5"/>
   </p:notesMasterIdLst>
   <p:sldIdLst>
     <p:sldId id="256" r:id="rId2"/>
-    <p:sldId id="257" r:id="rId3"/>
+    <p:sldId id="258" r:id="rId3"/>
+    <p:sldId id="257" r:id="rId4"/>
   </p:sldIdLst>
   <p:sldSz cx="12192000" cy="6858000"/>
   <p:notesSz cx="6858000" cy="9144000"/>
@@ -4895,7 +4896,7 @@
         </p:nvSpPr>
         <p:spPr>
           <a:xfrm>
-            <a:off x="5606181" y="3244334"/>
+            <a:off x="5134361" y="3281073"/>
             <a:ext cx="1800493" cy="369332"/>
           </a:xfrm>
           <a:prstGeom prst="rect">
@@ -5076,7 +5077,7 @@
         </p:nvSpPr>
         <p:spPr>
           <a:xfrm>
-            <a:off x="3805401" y="357758"/>
+            <a:off x="3909377" y="146331"/>
             <a:ext cx="4031873" cy="400110"/>
           </a:xfrm>
           <a:prstGeom prst="rect">
@@ -5100,6 +5101,78 @@
               <a:t>空気抜きライン割り込みイメージ</a:t>
             </a:r>
             <a:endParaRPr lang="en-US" sz="2000" b="1" dirty="0"/>
+          </a:p>
+        </p:txBody>
+      </p:sp>
+      <p:sp>
+        <p:nvSpPr>
+          <p:cNvPr id="97" name="TextBox 96">
+            <a:extLst>
+              <a:ext uri="{FF2B5EF4-FFF2-40B4-BE49-F238E27FC236}">
+                <a16:creationId xmlns:a16="http://schemas.microsoft.com/office/drawing/2014/main" id="{937B66EE-84E6-40EC-F6B2-FE883AF40A26}"/>
+              </a:ext>
+            </a:extLst>
+          </p:cNvPr>
+          <p:cNvSpPr txBox="1"/>
+          <p:nvPr/>
+        </p:nvSpPr>
+        <p:spPr>
+          <a:xfrm>
+            <a:off x="7934057" y="754462"/>
+            <a:ext cx="1338828" cy="369332"/>
+          </a:xfrm>
+          <a:prstGeom prst="rect">
+            <a:avLst/>
+          </a:prstGeom>
+          <a:noFill/>
+        </p:spPr>
+        <p:txBody>
+          <a:bodyPr wrap="none" rtlCol="0">
+            <a:spAutoFit/>
+          </a:bodyPr>
+          <a:lstStyle/>
+          <a:p>
+            <a:r>
+              <a:rPr lang="ja-JP" altLang="en-US" dirty="0"/>
+              <a:t>供給ライン</a:t>
+            </a:r>
+            <a:endParaRPr lang="en-US" dirty="0"/>
+          </a:p>
+        </p:txBody>
+      </p:sp>
+      <p:sp>
+        <p:nvSpPr>
+          <p:cNvPr id="98" name="TextBox 97">
+            <a:extLst>
+              <a:ext uri="{FF2B5EF4-FFF2-40B4-BE49-F238E27FC236}">
+                <a16:creationId xmlns:a16="http://schemas.microsoft.com/office/drawing/2014/main" id="{964E3415-73E4-066C-35C3-C69DF2FD544C}"/>
+              </a:ext>
+            </a:extLst>
+          </p:cNvPr>
+          <p:cNvSpPr txBox="1"/>
+          <p:nvPr/>
+        </p:nvSpPr>
+        <p:spPr>
+          <a:xfrm>
+            <a:off x="2646779" y="721406"/>
+            <a:ext cx="1338828" cy="369332"/>
+          </a:xfrm>
+          <a:prstGeom prst="rect">
+            <a:avLst/>
+          </a:prstGeom>
+          <a:noFill/>
+        </p:spPr>
+        <p:txBody>
+          <a:bodyPr wrap="none" rtlCol="0">
+            <a:spAutoFit/>
+          </a:bodyPr>
+          <a:lstStyle/>
+          <a:p>
+            <a:r>
+              <a:rPr lang="ja-JP" altLang="en-US" dirty="0"/>
+              <a:t>廃液ライン</a:t>
+            </a:r>
+            <a:endParaRPr lang="en-US" dirty="0"/>
           </a:p>
         </p:txBody>
       </p:sp>
@@ -5135,10 +5208,10 @@
       </p:grpSpPr>
       <p:pic>
         <p:nvPicPr>
-          <p:cNvPr id="7" name="Picture 6">
-            <a:extLst>
-              <a:ext uri="{FF2B5EF4-FFF2-40B4-BE49-F238E27FC236}">
-                <a16:creationId xmlns:a16="http://schemas.microsoft.com/office/drawing/2014/main" id="{A933C12D-2FC0-841A-4430-5D0524BE8EEC}"/>
+          <p:cNvPr id="5" name="Picture 4">
+            <a:extLst>
+              <a:ext uri="{FF2B5EF4-FFF2-40B4-BE49-F238E27FC236}">
+                <a16:creationId xmlns:a16="http://schemas.microsoft.com/office/drawing/2014/main" id="{17EC95E6-79BD-040B-15A4-11FE82FE7D25}"/>
               </a:ext>
             </a:extLst>
           </p:cNvPr>
@@ -5155,14 +5228,128 @@
         </p:blipFill>
         <p:spPr>
           <a:xfrm>
-            <a:off x="449628" y="444659"/>
-            <a:ext cx="11292743" cy="5968681"/>
+            <a:off x="690833" y="350197"/>
+            <a:ext cx="10810334" cy="6361888"/>
           </a:xfrm>
           <a:prstGeom prst="rect">
             <a:avLst/>
           </a:prstGeom>
         </p:spPr>
       </p:pic>
+    </p:spTree>
+    <p:extLst>
+      <p:ext uri="{BB962C8B-B14F-4D97-AF65-F5344CB8AC3E}">
+        <p14:creationId xmlns:p14="http://schemas.microsoft.com/office/powerpoint/2010/main" val="4164802253"/>
+      </p:ext>
+    </p:extLst>
+  </p:cSld>
+  <p:clrMapOvr>
+    <a:masterClrMapping/>
+  </p:clrMapOvr>
+</p:sld>
+</file>
+
+<file path=ppt/slides/slide3.xml><?xml version="1.0" encoding="utf-8"?>
+<p:sld xmlns:a="http://schemas.openxmlformats.org/drawingml/2006/main" xmlns:r="http://schemas.openxmlformats.org/officeDocument/2006/relationships" xmlns:p="http://schemas.openxmlformats.org/presentationml/2006/main">
+  <p:cSld>
+    <p:spTree>
+      <p:nvGrpSpPr>
+        <p:cNvPr id="1" name=""/>
+        <p:cNvGrpSpPr/>
+        <p:nvPr/>
+      </p:nvGrpSpPr>
+      <p:grpSpPr>
+        <a:xfrm>
+          <a:off x="0" y="0"/>
+          <a:ext cx="0" cy="0"/>
+          <a:chOff x="0" y="0"/>
+          <a:chExt cx="0" cy="0"/>
+        </a:xfrm>
+      </p:grpSpPr>
+      <p:pic>
+        <p:nvPicPr>
+          <p:cNvPr id="7" name="Picture 6">
+            <a:extLst>
+              <a:ext uri="{FF2B5EF4-FFF2-40B4-BE49-F238E27FC236}">
+                <a16:creationId xmlns:a16="http://schemas.microsoft.com/office/drawing/2014/main" id="{A933C12D-2FC0-841A-4430-5D0524BE8EEC}"/>
+              </a:ext>
+            </a:extLst>
+          </p:cNvPr>
+          <p:cNvPicPr>
+            <a:picLocks noChangeAspect="1"/>
+          </p:cNvPicPr>
+          <p:nvPr/>
+        </p:nvPicPr>
+        <p:blipFill>
+          <a:blip r:embed="rId2"/>
+          <a:stretch>
+            <a:fillRect/>
+          </a:stretch>
+        </p:blipFill>
+        <p:spPr>
+          <a:xfrm>
+            <a:off x="449628" y="444659"/>
+            <a:ext cx="11292743" cy="5968681"/>
+          </a:xfrm>
+          <a:prstGeom prst="rect">
+            <a:avLst/>
+          </a:prstGeom>
+        </p:spPr>
+      </p:pic>
+      <p:sp>
+        <p:nvSpPr>
+          <p:cNvPr id="3" name="TextBox 2">
+            <a:extLst>
+              <a:ext uri="{FF2B5EF4-FFF2-40B4-BE49-F238E27FC236}">
+                <a16:creationId xmlns:a16="http://schemas.microsoft.com/office/drawing/2014/main" id="{4E840DB6-A6B3-3DD4-1DD9-C16D33542546}"/>
+              </a:ext>
+            </a:extLst>
+          </p:cNvPr>
+          <p:cNvSpPr txBox="1"/>
+          <p:nvPr/>
+        </p:nvSpPr>
+        <p:spPr>
+          <a:xfrm>
+            <a:off x="732623" y="2699586"/>
+            <a:ext cx="3192862" cy="646331"/>
+          </a:xfrm>
+          <a:prstGeom prst="rect">
+            <a:avLst/>
+          </a:prstGeom>
+          <a:noFill/>
+        </p:spPr>
+        <p:txBody>
+          <a:bodyPr wrap="none" rtlCol="0">
+            <a:spAutoFit/>
+          </a:bodyPr>
+          <a:lstStyle/>
+          <a:p>
+            <a:r>
+              <a:rPr lang="en-US" dirty="0"/>
+              <a:t>V1: Solenoid Valve (</a:t>
+            </a:r>
+            <a:r>
+              <a:rPr lang="ja-JP" altLang="en-US" dirty="0"/>
+              <a:t>供給</a:t>
+            </a:r>
+            <a:r>
+              <a:rPr lang="en-US" dirty="0"/>
+              <a:t>)</a:t>
+            </a:r>
+          </a:p>
+          <a:p>
+            <a:r>
+              <a:rPr lang="en-US" dirty="0"/>
+              <a:t>V2: Solenoid Valve (</a:t>
+            </a:r>
+            <a:r>
+              <a:rPr lang="ja-JP" altLang="en-US" dirty="0"/>
+              <a:t>空気抜き）</a:t>
+            </a:r>
+            <a:endParaRPr lang="en-US" dirty="0"/>
+          </a:p>
+        </p:txBody>
+      </p:sp>
     </p:spTree>
     <p:extLst>
       <p:ext uri="{BB962C8B-B14F-4D97-AF65-F5344CB8AC3E}">

--- a/relay 3.pptx
+++ b/relay 3.pptx
@@ -5,12 +5,13 @@
     <p:sldMasterId id="2147483648" r:id="rId1"/>
   </p:sldMasterIdLst>
   <p:notesMasterIdLst>
-    <p:notesMasterId r:id="rId5"/>
+    <p:notesMasterId r:id="rId6"/>
   </p:notesMasterIdLst>
   <p:sldIdLst>
     <p:sldId id="256" r:id="rId2"/>
     <p:sldId id="258" r:id="rId3"/>
     <p:sldId id="257" r:id="rId4"/>
+    <p:sldId id="259" r:id="rId5"/>
   </p:sldIdLst>
   <p:sldSz cx="12192000" cy="6858000"/>
   <p:notesSz cx="6858000" cy="9144000"/>
@@ -199,7 +200,7 @@
           <a:p>
             <a:fld id="{E2C00488-B39B-431A-A446-D9D5A4CB7876}" type="datetimeFigureOut">
               <a:rPr lang="en-US" smtClean="0"/>
-              <a:t>7/18/2026</a:t>
+              <a:t>7/20/2026</a:t>
             </a:fld>
             <a:endParaRPr lang="en-US"/>
           </a:p>
@@ -697,7 +698,7 @@
           <a:p>
             <a:fld id="{CDAFE869-D4FF-4C35-882B-92CB2246D8C9}" type="datetimeFigureOut">
               <a:rPr lang="en-US" smtClean="0"/>
-              <a:t>7/18/2026</a:t>
+              <a:t>7/20/2026</a:t>
             </a:fld>
             <a:endParaRPr lang="en-US"/>
           </a:p>
@@ -895,7 +896,7 @@
           <a:p>
             <a:fld id="{CDAFE869-D4FF-4C35-882B-92CB2246D8C9}" type="datetimeFigureOut">
               <a:rPr lang="en-US" smtClean="0"/>
-              <a:t>7/18/2026</a:t>
+              <a:t>7/20/2026</a:t>
             </a:fld>
             <a:endParaRPr lang="en-US"/>
           </a:p>
@@ -1103,7 +1104,7 @@
           <a:p>
             <a:fld id="{CDAFE869-D4FF-4C35-882B-92CB2246D8C9}" type="datetimeFigureOut">
               <a:rPr lang="en-US" smtClean="0"/>
-              <a:t>7/18/2026</a:t>
+              <a:t>7/20/2026</a:t>
             </a:fld>
             <a:endParaRPr lang="en-US"/>
           </a:p>
@@ -1301,7 +1302,7 @@
           <a:p>
             <a:fld id="{CDAFE869-D4FF-4C35-882B-92CB2246D8C9}" type="datetimeFigureOut">
               <a:rPr lang="en-US" smtClean="0"/>
-              <a:t>7/18/2026</a:t>
+              <a:t>7/20/2026</a:t>
             </a:fld>
             <a:endParaRPr lang="en-US"/>
           </a:p>
@@ -1576,7 +1577,7 @@
           <a:p>
             <a:fld id="{CDAFE869-D4FF-4C35-882B-92CB2246D8C9}" type="datetimeFigureOut">
               <a:rPr lang="en-US" smtClean="0"/>
-              <a:t>7/18/2026</a:t>
+              <a:t>7/20/2026</a:t>
             </a:fld>
             <a:endParaRPr lang="en-US"/>
           </a:p>
@@ -1841,7 +1842,7 @@
           <a:p>
             <a:fld id="{CDAFE869-D4FF-4C35-882B-92CB2246D8C9}" type="datetimeFigureOut">
               <a:rPr lang="en-US" smtClean="0"/>
-              <a:t>7/18/2026</a:t>
+              <a:t>7/20/2026</a:t>
             </a:fld>
             <a:endParaRPr lang="en-US"/>
           </a:p>
@@ -2253,7 +2254,7 @@
           <a:p>
             <a:fld id="{CDAFE869-D4FF-4C35-882B-92CB2246D8C9}" type="datetimeFigureOut">
               <a:rPr lang="en-US" smtClean="0"/>
-              <a:t>7/18/2026</a:t>
+              <a:t>7/20/2026</a:t>
             </a:fld>
             <a:endParaRPr lang="en-US"/>
           </a:p>
@@ -2394,7 +2395,7 @@
           <a:p>
             <a:fld id="{CDAFE869-D4FF-4C35-882B-92CB2246D8C9}" type="datetimeFigureOut">
               <a:rPr lang="en-US" smtClean="0"/>
-              <a:t>7/18/2026</a:t>
+              <a:t>7/20/2026</a:t>
             </a:fld>
             <a:endParaRPr lang="en-US"/>
           </a:p>
@@ -2507,7 +2508,7 @@
           <a:p>
             <a:fld id="{CDAFE869-D4FF-4C35-882B-92CB2246D8C9}" type="datetimeFigureOut">
               <a:rPr lang="en-US" smtClean="0"/>
-              <a:t>7/18/2026</a:t>
+              <a:t>7/20/2026</a:t>
             </a:fld>
             <a:endParaRPr lang="en-US"/>
           </a:p>
@@ -2818,7 +2819,7 @@
           <a:p>
             <a:fld id="{CDAFE869-D4FF-4C35-882B-92CB2246D8C9}" type="datetimeFigureOut">
               <a:rPr lang="en-US" smtClean="0"/>
-              <a:t>7/18/2026</a:t>
+              <a:t>7/20/2026</a:t>
             </a:fld>
             <a:endParaRPr lang="en-US"/>
           </a:p>
@@ -3106,7 +3107,7 @@
           <a:p>
             <a:fld id="{CDAFE869-D4FF-4C35-882B-92CB2246D8C9}" type="datetimeFigureOut">
               <a:rPr lang="en-US" smtClean="0"/>
-              <a:t>7/18/2026</a:t>
+              <a:t>7/20/2026</a:t>
             </a:fld>
             <a:endParaRPr lang="en-US"/>
           </a:p>
@@ -3347,7 +3348,7 @@
           <a:p>
             <a:fld id="{CDAFE869-D4FF-4C35-882B-92CB2246D8C9}" type="datetimeFigureOut">
               <a:rPr lang="en-US" smtClean="0"/>
-              <a:t>7/18/2026</a:t>
+              <a:t>7/20/2026</a:t>
             </a:fld>
             <a:endParaRPr lang="en-US"/>
           </a:p>
@@ -5354,6 +5355,66 @@
     <p:extLst>
       <p:ext uri="{BB962C8B-B14F-4D97-AF65-F5344CB8AC3E}">
         <p14:creationId xmlns:p14="http://schemas.microsoft.com/office/powerpoint/2010/main" val="2404823538"/>
+      </p:ext>
+    </p:extLst>
+  </p:cSld>
+  <p:clrMapOvr>
+    <a:masterClrMapping/>
+  </p:clrMapOvr>
+</p:sld>
+</file>
+
+<file path=ppt/slides/slide4.xml><?xml version="1.0" encoding="utf-8"?>
+<p:sld xmlns:a="http://schemas.openxmlformats.org/drawingml/2006/main" xmlns:r="http://schemas.openxmlformats.org/officeDocument/2006/relationships" xmlns:p="http://schemas.openxmlformats.org/presentationml/2006/main">
+  <p:cSld>
+    <p:spTree>
+      <p:nvGrpSpPr>
+        <p:cNvPr id="1" name=""/>
+        <p:cNvGrpSpPr/>
+        <p:nvPr/>
+      </p:nvGrpSpPr>
+      <p:grpSpPr>
+        <a:xfrm>
+          <a:off x="0" y="0"/>
+          <a:ext cx="0" cy="0"/>
+          <a:chOff x="0" y="0"/>
+          <a:chExt cx="0" cy="0"/>
+        </a:xfrm>
+      </p:grpSpPr>
+      <p:pic>
+        <p:nvPicPr>
+          <p:cNvPr id="7" name="Picture 6">
+            <a:extLst>
+              <a:ext uri="{FF2B5EF4-FFF2-40B4-BE49-F238E27FC236}">
+                <a16:creationId xmlns:a16="http://schemas.microsoft.com/office/drawing/2014/main" id="{02B3BB5B-666A-AB90-A15E-BDCEE00B4064}"/>
+              </a:ext>
+            </a:extLst>
+          </p:cNvPr>
+          <p:cNvPicPr>
+            <a:picLocks noChangeAspect="1"/>
+          </p:cNvPicPr>
+          <p:nvPr/>
+        </p:nvPicPr>
+        <p:blipFill>
+          <a:blip r:embed="rId2"/>
+          <a:stretch>
+            <a:fillRect/>
+          </a:stretch>
+        </p:blipFill>
+        <p:spPr>
+          <a:xfrm>
+            <a:off x="2999122" y="484632"/>
+            <a:ext cx="6146402" cy="5934456"/>
+          </a:xfrm>
+          <a:prstGeom prst="rect">
+            <a:avLst/>
+          </a:prstGeom>
+        </p:spPr>
+      </p:pic>
+    </p:spTree>
+    <p:extLst>
+      <p:ext uri="{BB962C8B-B14F-4D97-AF65-F5344CB8AC3E}">
+        <p14:creationId xmlns:p14="http://schemas.microsoft.com/office/powerpoint/2010/main" val="390369960"/>
       </p:ext>
     </p:extLst>
   </p:cSld>

--- a/relay 3.pptx
+++ b/relay 3.pptx
@@ -5383,10 +5383,10 @@
       </p:grpSpPr>
       <p:pic>
         <p:nvPicPr>
-          <p:cNvPr id="7" name="Picture 6">
-            <a:extLst>
-              <a:ext uri="{FF2B5EF4-FFF2-40B4-BE49-F238E27FC236}">
-                <a16:creationId xmlns:a16="http://schemas.microsoft.com/office/drawing/2014/main" id="{02B3BB5B-666A-AB90-A15E-BDCEE00B4064}"/>
+          <p:cNvPr id="9" name="Picture 8">
+            <a:extLst>
+              <a:ext uri="{FF2B5EF4-FFF2-40B4-BE49-F238E27FC236}">
+                <a16:creationId xmlns:a16="http://schemas.microsoft.com/office/drawing/2014/main" id="{FD8E432B-6C29-E41D-BBC6-61C5E403B847}"/>
               </a:ext>
             </a:extLst>
           </p:cNvPr>
@@ -5403,8 +5403,8 @@
         </p:blipFill>
         <p:spPr>
           <a:xfrm>
-            <a:off x="2999122" y="484632"/>
-            <a:ext cx="6146402" cy="5934456"/>
+            <a:off x="2871216" y="460599"/>
+            <a:ext cx="6255829" cy="6190323"/>
           </a:xfrm>
           <a:prstGeom prst="rect">
             <a:avLst/>
